--- a/docs/entrega/Presentacion_BFS_Junta_Saneamiento_5min.pptx
+++ b/docs/entrega/Presentacion_BFS_Junta_Saneamiento_5min.pptx
@@ -2,18 +2,18 @@
 <file path=ppt/presentation.xml><?xml version="1.0" encoding="utf-8"?>
 <p:presentation xmlns:p="http://schemas.openxmlformats.org/presentationml/2006/main">
   <p:sldMasterIdLst>
-    <p:sldMasterId xmlns:r="http://schemas.openxmlformats.org/officeDocument/2006/relationships" id="2147483648" r:id="R7da22d323134420e"/>
+    <p:sldMasterId xmlns:r="http://schemas.openxmlformats.org/officeDocument/2006/relationships" id="2147483648" r:id="Rfe991cc90e454fcd"/>
   </p:sldMasterIdLst>
   <p:notesMasterIdLst>
-    <p:notesMasterId xmlns:r="http://schemas.openxmlformats.org/officeDocument/2006/relationships" r:id="R5e2b8b7cdadc4ae0"/>
+    <p:notesMasterId xmlns:r="http://schemas.openxmlformats.org/officeDocument/2006/relationships" r:id="Rd085ad19de9145f8"/>
   </p:notesMasterIdLst>
   <p:sldIdLst>
-    <p:sldId xmlns:r="http://schemas.openxmlformats.org/officeDocument/2006/relationships" id="256" r:id="R83a29d113204403e"/>
-    <p:sldId xmlns:r="http://schemas.openxmlformats.org/officeDocument/2006/relationships" id="257" r:id="R90a3c5c00eef455d"/>
-    <p:sldId xmlns:r="http://schemas.openxmlformats.org/officeDocument/2006/relationships" id="258" r:id="R4e99f23a07844d1a"/>
-    <p:sldId xmlns:r="http://schemas.openxmlformats.org/officeDocument/2006/relationships" id="259" r:id="R9a91022904144c19"/>
-    <p:sldId xmlns:r="http://schemas.openxmlformats.org/officeDocument/2006/relationships" id="260" r:id="Rd2d38acdd4014f6d"/>
-    <p:sldId xmlns:r="http://schemas.openxmlformats.org/officeDocument/2006/relationships" id="261" r:id="Rc69530cf6fd440b7"/>
+    <p:sldId xmlns:r="http://schemas.openxmlformats.org/officeDocument/2006/relationships" id="256" r:id="R51a390361a8e4db6"/>
+    <p:sldId xmlns:r="http://schemas.openxmlformats.org/officeDocument/2006/relationships" id="257" r:id="R31ecb0ab2d3a495a"/>
+    <p:sldId xmlns:r="http://schemas.openxmlformats.org/officeDocument/2006/relationships" id="258" r:id="R0ee0b95dbb4f4db2"/>
+    <p:sldId xmlns:r="http://schemas.openxmlformats.org/officeDocument/2006/relationships" id="259" r:id="R4ebd4a4dd8f049a7"/>
+    <p:sldId xmlns:r="http://schemas.openxmlformats.org/officeDocument/2006/relationships" id="260" r:id="Re5e736a77bcb4f52"/>
+    <p:sldId xmlns:r="http://schemas.openxmlformats.org/officeDocument/2006/relationships" id="261" r:id="Raea5ff67e6ce496f"/>
   </p:sldIdLst>
   <p:sldSz cx="12192000" cy="6858000"/>
   <p:notesSz cx="6858000" cy="9144000"/>
@@ -727,7 +727,7 @@
           </a:p>
           <a:p xmlns:a="http://schemas.openxmlformats.org/drawingml/2006/main">
             <a:r>
-              <a:t>La implementación real separa la red, BFS y la consola. En bfs.py usamos deque y un set de visitados; network.neighbors aporta el orden validado. La CLI muestra los puntos por nivel, reconstruye la ruta S1-S2-S4-S7 y reporta los no alcanzables.</a:t>
+              <a:t>El ejemplo puede ejecutarse desde la consola o Python. scenarios.py usa ayudantes pequeños para copiar, reconstruir y ejecutar. Cada función muestra directamente el cambio que realiza y todo reutiliza el mismo BFS.</a:t>
             </a:r>
           </a:p>
           <a:p xmlns:a="http://schemas.openxmlformats.org/drawingml/2006/main">
@@ -742,22 +742,17 @@
           </a:p>
           <a:p xmlns:a="http://schemas.openxmlformats.org/drawingml/2006/main">
             <a:r>
-              <a:t>Plan_Ejecucion_BFS_Junta_Saneamiento_Corregido.pdf, páginas 4-6</a:t>
-            </a:r>
-          </a:p>
-          <a:p xmlns:a="http://schemas.openxmlformats.org/drawingml/2006/main">
-            <a:r>
-              <a:t>src/junta_saneamiento/bfs.py</a:t>
+              <a:t>Plan_Ejecucion_BFS_Junta_Saneamiento_Corregido.pdf, páginas 5-7</a:t>
+            </a:r>
+          </a:p>
+          <a:p xmlns:a="http://schemas.openxmlformats.org/drawingml/2006/main">
+            <a:r>
+              <a:t>src/junta_saneamiento/scenarios.py</a:t>
             </a:r>
           </a:p>
           <a:p xmlns:a="http://schemas.openxmlformats.org/drawingml/2006/main">
             <a:r>
               <a:t>src/junta_saneamiento/cli.py</a:t>
-            </a:r>
-          </a:p>
-          <a:p xmlns:a="http://schemas.openxmlformats.org/drawingml/2006/main">
-            <a:r>
-              <a:t>https://docs.python.org/3/library/collections.html#collections.deque</a:t>
             </a:r>
           </a:p>
         </p:txBody>
@@ -832,7 +827,7 @@
           </a:p>
           <a:p xmlns:a="http://schemas.openxmlformats.org/drawingml/2006/main">
             <a:r>
-              <a:t>La suite actual contiene seis métodos unittest. Verifica recorrido y ruta, ciclo y origen alterno, nodo aislado y origen inválido, carga válida, referencias u orden incorrectos y JSON inválido. Las seis pruebas aprueban. BFS conserva complejidad O(V + E).</a:t>
+              <a:t>Las trece pruebas continúan aprobadas después de simplificar el código. La aplicación usa argparse, collections, dataclasses, json y pathlib, todos incluidos con Python. No necesita paquetes externos en tiempo de ejecución.</a:t>
             </a:r>
           </a:p>
           <a:p xmlns:a="http://schemas.openxmlformats.org/drawingml/2006/main">
@@ -852,12 +847,17 @@
           </a:p>
           <a:p xmlns:a="http://schemas.openxmlformats.org/drawingml/2006/main">
             <a:r>
-              <a:t>tests/test_bfs.py</a:t>
-            </a:r>
-          </a:p>
-          <a:p xmlns:a="http://schemas.openxmlformats.org/drawingml/2006/main">
-            <a:r>
-              <a:t>tests/test_network.py</a:t>
+              <a:t>pyproject.toml</a:t>
+            </a:r>
+          </a:p>
+          <a:p xmlns:a="http://schemas.openxmlformats.org/drawingml/2006/main">
+            <a:r>
+              <a:t>src/junta_saneamiento/</a:t>
+            </a:r>
+          </a:p>
+          <a:p xmlns:a="http://schemas.openxmlformats.org/drawingml/2006/main">
+            <a:r>
+              <a:t>tests/</a:t>
             </a:r>
           </a:p>
         </p:txBody>
@@ -932,7 +932,7 @@
           </a:p>
           <a:p xmlns:a="http://schemas.openxmlformats.org/drawingml/2006/main">
             <a:r>
-              <a:t>En conclusión, BFS responde exactamente al sorteo: implementamos una búsqueda no informada en Python, modelamos la conectividad de la Junta de Saneamiento y demostramos la propagación por niveles. La solución entrega un orden claro, rutas mínimas por enlaces y resultados verificables.</a:t>
+              <a:t>La solución final conserva sólo cuatro responsabilidades: validar datos, ejecutar BFS, crear variantes y mostrar resultados. El comportamiento permanece verificable con Python estándar.</a:t>
             </a:r>
           </a:p>
           <a:p xmlns:a="http://schemas.openxmlformats.org/drawingml/2006/main">
@@ -947,7 +947,12 @@
           </a:p>
           <a:p xmlns:a="http://schemas.openxmlformats.org/drawingml/2006/main">
             <a:r>
-              <a:t>Plan_Ejecucion_BFS_Junta_Saneamiento_Corregido.pdf, página 9</a:t>
+              <a:t>Plan_Ejecucion_BFS_Junta_Saneamiento_Corregido.pdf, páginas 5-9</a:t>
+            </a:r>
+          </a:p>
+          <a:p xmlns:a="http://schemas.openxmlformats.org/drawingml/2006/main">
+            <a:r>
+              <a:t>README.md</a:t>
             </a:r>
           </a:p>
         </p:txBody>
@@ -1015,7 +1020,7 @@
   </p:cSld>
   <p:clrMap bg1="lt1" tx1="dk1" bg2="lt2" tx2="dk2" accent1="accent1" accent2="accent2" accent3="accent3" accent4="accent4" accent5="accent5" accent6="accent6" hlink="hlink" folHlink="folHlink"/>
   <p:sldLayoutIdLst>
-    <p:sldLayoutId xmlns:r="http://schemas.openxmlformats.org/officeDocument/2006/relationships" id="2147483649" r:id="R25643f2efcec4be0"/>
+    <p:sldLayoutId xmlns:r="http://schemas.openxmlformats.org/officeDocument/2006/relationships" id="2147483649" r:id="R205c0e52773c47df"/>
   </p:sldLayoutIdLst>
   <p:txStyles>
     <p:titleStyle>
@@ -2585,7 +2590,7 @@
       </p:sp>
       <p:cxnSp>
         <p:nvCxnSpPr>
-          <p:cNvPr id="100" name=""/>
+          <p:cNvPr id="204" name=""/>
           <p:cNvCxnSpPr>
             <a:stCxn xmlns:a="http://schemas.openxmlformats.org/drawingml/2006/main" id="7" idx="7"/>
             <a:endCxn xmlns:a="http://schemas.openxmlformats.org/drawingml/2006/main" id="9" idx="3"/>
@@ -2610,7 +2615,7 @@
       </p:cxnSp>
       <p:cxnSp>
         <p:nvCxnSpPr>
-          <p:cNvPr id="101" name=""/>
+          <p:cNvPr id="205" name=""/>
           <p:cNvCxnSpPr>
             <a:stCxn xmlns:a="http://schemas.openxmlformats.org/drawingml/2006/main" id="7" idx="5"/>
             <a:endCxn xmlns:a="http://schemas.openxmlformats.org/drawingml/2006/main" id="11" idx="1"/>
@@ -2635,7 +2640,7 @@
       </p:cxnSp>
       <p:cxnSp>
         <p:nvCxnSpPr>
-          <p:cNvPr id="102" name=""/>
+          <p:cNvPr id="206" name=""/>
           <p:cNvCxnSpPr>
             <a:stCxn xmlns:a="http://schemas.openxmlformats.org/drawingml/2006/main" id="9" idx="6"/>
             <a:endCxn xmlns:a="http://schemas.openxmlformats.org/drawingml/2006/main" id="13" idx="2"/>
@@ -2660,7 +2665,7 @@
       </p:cxnSp>
       <p:cxnSp>
         <p:nvCxnSpPr>
-          <p:cNvPr id="103" name=""/>
+          <p:cNvPr id="207" name=""/>
           <p:cNvCxnSpPr>
             <a:stCxn xmlns:a="http://schemas.openxmlformats.org/drawingml/2006/main" id="9" idx="5"/>
             <a:endCxn xmlns:a="http://schemas.openxmlformats.org/drawingml/2006/main" id="15" idx="1"/>
@@ -2685,7 +2690,7 @@
       </p:cxnSp>
       <p:cxnSp>
         <p:nvCxnSpPr>
-          <p:cNvPr id="104" name=""/>
+          <p:cNvPr id="208" name=""/>
           <p:cNvCxnSpPr>
             <a:stCxn xmlns:a="http://schemas.openxmlformats.org/drawingml/2006/main" id="11" idx="6"/>
             <a:endCxn xmlns:a="http://schemas.openxmlformats.org/drawingml/2006/main" id="17" idx="1"/>
@@ -2710,7 +2715,7 @@
       </p:cxnSp>
       <p:cxnSp>
         <p:nvCxnSpPr>
-          <p:cNvPr id="105" name=""/>
+          <p:cNvPr id="209" name=""/>
           <p:cNvCxnSpPr>
             <a:stCxn xmlns:a="http://schemas.openxmlformats.org/drawingml/2006/main" id="13" idx="6"/>
             <a:endCxn xmlns:a="http://schemas.openxmlformats.org/drawingml/2006/main" id="19" idx="2"/>
@@ -4425,7 +4430,7 @@
       </p:sp>
       <p:cxnSp>
         <p:nvCxnSpPr>
-          <p:cNvPr id="149" name=""/>
+          <p:cNvPr id="301" name=""/>
           <p:cNvCxnSpPr>
             <a:stCxn xmlns:a="http://schemas.openxmlformats.org/drawingml/2006/main" id="12" idx="7"/>
             <a:endCxn xmlns:a="http://schemas.openxmlformats.org/drawingml/2006/main" id="15" idx="3"/>
@@ -4450,7 +4455,7 @@
       </p:cxnSp>
       <p:cxnSp>
         <p:nvCxnSpPr>
-          <p:cNvPr id="150" name=""/>
+          <p:cNvPr id="302" name=""/>
           <p:cNvCxnSpPr>
             <a:stCxn xmlns:a="http://schemas.openxmlformats.org/drawingml/2006/main" id="12" idx="5"/>
             <a:endCxn xmlns:a="http://schemas.openxmlformats.org/drawingml/2006/main" id="18" idx="1"/>
@@ -4475,7 +4480,7 @@
       </p:cxnSp>
       <p:cxnSp>
         <p:nvCxnSpPr>
-          <p:cNvPr id="151" name=""/>
+          <p:cNvPr id="303" name=""/>
           <p:cNvCxnSpPr>
             <a:stCxn xmlns:a="http://schemas.openxmlformats.org/drawingml/2006/main" id="15" idx="6"/>
             <a:endCxn xmlns:a="http://schemas.openxmlformats.org/drawingml/2006/main" id="21" idx="2"/>
@@ -4500,7 +4505,7 @@
       </p:cxnSp>
       <p:cxnSp>
         <p:nvCxnSpPr>
-          <p:cNvPr id="152" name=""/>
+          <p:cNvPr id="304" name=""/>
           <p:cNvCxnSpPr>
             <a:stCxn xmlns:a="http://schemas.openxmlformats.org/drawingml/2006/main" id="15" idx="5"/>
             <a:endCxn xmlns:a="http://schemas.openxmlformats.org/drawingml/2006/main" id="24" idx="1"/>
@@ -4525,7 +4530,7 @@
       </p:cxnSp>
       <p:cxnSp>
         <p:nvCxnSpPr>
-          <p:cNvPr id="153" name=""/>
+          <p:cNvPr id="305" name=""/>
           <p:cNvCxnSpPr>
             <a:stCxn xmlns:a="http://schemas.openxmlformats.org/drawingml/2006/main" id="18" idx="6"/>
             <a:endCxn xmlns:a="http://schemas.openxmlformats.org/drawingml/2006/main" id="27" idx="2"/>
@@ -4550,7 +4555,7 @@
       </p:cxnSp>
       <p:cxnSp>
         <p:nvCxnSpPr>
-          <p:cNvPr id="154" name=""/>
+          <p:cNvPr id="306" name=""/>
           <p:cNvCxnSpPr>
             <a:stCxn xmlns:a="http://schemas.openxmlformats.org/drawingml/2006/main" id="21" idx="6"/>
             <a:endCxn xmlns:a="http://schemas.openxmlformats.org/drawingml/2006/main" id="30" idx="2"/>
@@ -6557,7 +6562,7 @@
                 <a:ea typeface="Arial"/>
                 <a:cs typeface="Arial"/>
               </a:rPr>
-              <a:t>EXTRACTO REAL DE bfs.py</a:t>
+              <a:t>CONSOLA Y PYTHON</a:t>
             </a:r>
           </a:p>
         </p:txBody>
@@ -6649,7 +6654,7 @@
                 <a:ea typeface="Arial"/>
                 <a:cs typeface="Arial"/>
               </a:rPr>
-              <a:t>queue = deque([origin])</a:t>
+              <a:t># Consola</a:t>
             </a:r>
           </a:p>
           <a:p xmlns:a="http://schemas.openxmlformats.org/drawingml/2006/main">
@@ -6673,7 +6678,7 @@
                 <a:ea typeface="Arial"/>
                 <a:cs typeface="Arial"/>
               </a:rPr>
-              <a:t>visited = {origin}</a:t>
+              <a:t>python -m junta_saneamiento --escenario</a:t>
             </a:r>
           </a:p>
           <a:p xmlns:a="http://schemas.openxmlformats.org/drawingml/2006/main">
@@ -6697,7 +6702,7 @@
                 <a:ea typeface="Arial"/>
                 <a:cs typeface="Arial"/>
               </a:rPr>
-              <a:t>levels = {origin: 0}</a:t>
+              <a:t>  rotura-toma-s8</a:t>
             </a:r>
           </a:p>
           <a:p xmlns:a="http://schemas.openxmlformats.org/drawingml/2006/main">
@@ -6726,7 +6731,7 @@
                 <a:ea typeface="Arial"/>
                 <a:cs typeface="Arial"/>
               </a:rPr>
-              <a:t>while queue:</a:t>
+              <a:t># Python</a:t>
             </a:r>
           </a:p>
           <a:p xmlns:a="http://schemas.openxmlformats.org/drawingml/2006/main">
@@ -6750,7 +6755,7 @@
                 <a:ea typeface="Arial"/>
                 <a:cs typeface="Arial"/>
               </a:rPr>
-              <a:t>    current = queue.popleft()</a:t>
+              <a:t>from junta_saneamiento import (</a:t>
             </a:r>
           </a:p>
           <a:p xmlns:a="http://schemas.openxmlformats.org/drawingml/2006/main">
@@ -6774,7 +6779,7 @@
                 <a:ea typeface="Arial"/>
                 <a:cs typeface="Arial"/>
               </a:rPr>
-              <a:t>    for neighbor in network.neighbors[current]:</a:t>
+              <a:t>    simular_rotura_en_toma_s8</a:t>
             </a:r>
           </a:p>
           <a:p xmlns:a="http://schemas.openxmlformats.org/drawingml/2006/main">
@@ -6798,7 +6803,7 @@
                 <a:ea typeface="Arial"/>
                 <a:cs typeface="Arial"/>
               </a:rPr>
-              <a:t>        if neighbor not in visited:</a:t>
+              <a:t>)</a:t>
             </a:r>
           </a:p>
           <a:p xmlns:a="http://schemas.openxmlformats.org/drawingml/2006/main">
@@ -6822,7 +6827,7 @@
                 <a:ea typeface="Arial"/>
                 <a:cs typeface="Arial"/>
               </a:rPr>
-              <a:t>            visited.add(neighbor)</a:t>
+              <a:t>escenario = simular_rotura_en_toma_s8()</a:t>
             </a:r>
           </a:p>
           <a:p xmlns:a="http://schemas.openxmlformats.org/drawingml/2006/main">
@@ -6846,7 +6851,7 @@
                 <a:ea typeface="Arial"/>
                 <a:cs typeface="Arial"/>
               </a:rPr>
-              <a:t>            levels[neighbor] = levels[current] + 1</a:t>
+              <a:t>print(escenario.resultado.visit_order)</a:t>
             </a:r>
           </a:p>
           <a:p xmlns:a="http://schemas.openxmlformats.org/drawingml/2006/main">
@@ -6870,7 +6875,7 @@
                 <a:ea typeface="Arial"/>
                 <a:cs typeface="Arial"/>
               </a:rPr>
-              <a:t>            queue.append(neighbor)</a:t>
+              <a:t>print(escenario.ruta)</a:t>
             </a:r>
           </a:p>
         </p:txBody>
@@ -6929,7 +6934,7 @@
                 <a:ea typeface="Arial"/>
                 <a:cs typeface="Arial"/>
               </a:rPr>
-              <a:t>SALIDA DE LA DEMOSTRACIÓN</a:t>
+              <a:t>SALIDA DEL ESCENARIO S8</a:t>
             </a:r>
           </a:p>
         </p:txBody>
@@ -7023,12 +7028,12 @@
                 <a:ea typeface="Arial"/>
                 <a:cs typeface="Arial"/>
               </a:rPr>
-              <a:t>Origen: S1 - Tanque</a:t>
-            </a:r>
-          </a:p>
-          <a:p xmlns:a="http://schemas.openxmlformats.org/drawingml/2006/main">
-            <a:r>
-              <a:t>Nivel 1: S2, S3</a:t>
+              <a:t>Origen: S8 - Toma comunitaria 8</a:t>
+            </a:r>
+          </a:p>
+          <a:p xmlns:a="http://schemas.openxmlformats.org/drawingml/2006/main">
+            <a:r>
+              <a:t>Nivel 1: S5</a:t>
             </a:r>
           </a:p>
           <a:p xmlns:a="http://schemas.openxmlformats.org/drawingml/2006/main">
@@ -7052,12 +7057,12 @@
                 <a:ea typeface="Arial"/>
                 <a:cs typeface="Arial"/>
               </a:rPr>
-              <a:t>Nivel 2: S4, S5, S6</a:t>
-            </a:r>
-          </a:p>
-          <a:p xmlns:a="http://schemas.openxmlformats.org/drawingml/2006/main">
-            <a:r>
-              <a:t>Nivel 3: S7</a:t>
+              <a:t>Nivel 2: S2</a:t>
+            </a:r>
+          </a:p>
+          <a:p xmlns:a="http://schemas.openxmlformats.org/drawingml/2006/main">
+            <a:r>
+              <a:t>Destino S7: nivel 4</a:t>
             </a:r>
           </a:p>
           <a:p xmlns:a="http://schemas.openxmlformats.org/drawingml/2006/main">
@@ -7081,7 +7086,7 @@
                 <a:ea typeface="Arial"/>
                 <a:cs typeface="Arial"/>
               </a:rPr>
-              <a:t>Ruta a S7: S1 -&gt; S2 -&gt; S4 -&gt; S7</a:t>
+              <a:t>Ruta: S8 -&gt; S5 -&gt; S2 -&gt; S4 -&gt; S7</a:t>
             </a:r>
           </a:p>
           <a:p xmlns:a="http://schemas.openxmlformats.org/drawingml/2006/main">
@@ -7176,7 +7181,7 @@
                 <a:ea typeface="Arial"/>
                 <a:cs typeface="Arial"/>
               </a:rPr>
-              <a:t>network.neighbors: orden validado</a:t>
+              <a:t>Ayudantes pequeños y directos</a:t>
             </a:r>
           </a:p>
           <a:p xmlns:a="http://schemas.openxmlformats.org/drawingml/2006/main">
@@ -7200,7 +7205,7 @@
                 <a:ea typeface="Arial"/>
                 <a:cs typeface="Arial"/>
               </a:rPr>
-              <a:t>deque + set: recorrido eficiente</a:t>
+              <a:t>0 dependencias externas</a:t>
             </a:r>
           </a:p>
         </p:txBody>
@@ -7529,7 +7534,7 @@
                 <a:ea typeface="Arial"/>
                 <a:cs typeface="Arial"/>
               </a:rPr>
-              <a:t>El algoritmo cubre el caso normal y también sus fallas previsibles.</a:t>
+              <a:t>Código mínimo, cinco escenarios y fallas previsibles bajo prueba.</a:t>
             </a:r>
           </a:p>
         </p:txBody>
@@ -7619,7 +7624,7 @@
                 <a:ea typeface="Arial"/>
                 <a:cs typeface="Arial"/>
               </a:rPr>
-              <a:t>6 / 6</a:t>
+              <a:t>13 / 13</a:t>
             </a:r>
           </a:p>
         </p:txBody>
@@ -7976,7 +7981,7 @@
                 <a:ea typeface="Arial"/>
                 <a:cs typeface="Arial"/>
               </a:rPr>
-              <a:t>sensores duplicados</a:t>
+              <a:t>dependencias externas</a:t>
             </a:r>
           </a:p>
         </p:txBody>
@@ -8035,7 +8040,7 @@
                 <a:ea typeface="Arial"/>
                 <a:cs typeface="Arial"/>
               </a:rPr>
-              <a:t>6 pruebas: recorrido/ruta · ciclo/origen alterno · aislado/origen inválido · carga/errores JSON</a:t>
+              <a:t>5 escenarios: tanque · toma S8 · aislada S9 · enlace S2-S4 · origen S99</a:t>
             </a:r>
           </a:p>
         </p:txBody>
@@ -8864,7 +8869,7 @@
                 <a:ea typeface="Arial"/>
                 <a:cs typeface="Arial"/>
               </a:rPr>
-              <a:t>Entrega orden, ruta, pruebas y complejidad.</a:t>
+              <a:t>Orden, rutas y pruebas con Python estándar.</a:t>
             </a:r>
           </a:p>
         </p:txBody>
